--- a/AI_for_Operations_Course/Slides/Class_12_Capstone_Certification_Review.pptx
+++ b/AI_for_Operations_Course/Slides/Class_12_Capstone_Certification_Review.pptx
@@ -2595,6 +2595,10 @@
           </a:solidFill>
           <a:ln/>
         </p:spPr>
+        <p:txBody>
+          <a:bodyPr/>
+          <a:p/>
+        </p:txBody>
       </p:sp>
       <p:sp>
         <p:nvSpPr>
@@ -2925,6 +2929,10 @@
           </a:solidFill>
           <a:ln/>
         </p:spPr>
+        <p:txBody>
+          <a:bodyPr/>
+          <a:p/>
+        </p:txBody>
       </p:sp>
       <p:sp>
         <p:nvSpPr>
@@ -3295,6 +3303,10 @@
           </a:solidFill>
           <a:ln/>
         </p:spPr>
+        <p:txBody>
+          <a:bodyPr/>
+          <a:p/>
+        </p:txBody>
       </p:sp>
       <p:sp>
         <p:nvSpPr>
@@ -3665,6 +3677,10 @@
           </a:solidFill>
           <a:ln/>
         </p:spPr>
+        <p:txBody>
+          <a:bodyPr/>
+          <a:p/>
+        </p:txBody>
       </p:sp>
       <p:sp>
         <p:nvSpPr>
@@ -3699,7 +3715,7 @@
                 <a:ea typeface="Georgia" pitchFamily="34" charset="-122"/>
                 <a:cs typeface="Georgia" pitchFamily="34" charset="-120"/>
               </a:rPr>
-              <a:t>PCAP Python Certification: Exam Structure</a:t>
+              <a:t>PCAP (Proxiant Certified AI Professional): Exam Structure</a:t>
             </a:r>
             <a:endParaRPr lang="en-US" sz="3200" dirty="0"/>
           </a:p>
@@ -3739,7 +3755,7 @@
                 <a:ea typeface="Calibri" pitchFamily="34" charset="-122"/>
                 <a:cs typeface="Calibri" pitchFamily="34" charset="-120"/>
               </a:rPr>
-              <a:t>100 questions, 3 hours (1.8 min per question)</a:t>
+              <a:t>Final certification test: 60 questions, 90 minutes, 70% to pass</a:t>
             </a:r>
             <a:endParaRPr lang="en-US" sz="1400" dirty="0"/>
           </a:p>
@@ -3779,7 +3795,7 @@
                 <a:ea typeface="Calibri" pitchFamily="34" charset="-122"/>
                 <a:cs typeface="Calibri" pitchFamily="34" charset="-120"/>
               </a:rPr>
-              <a:t>70% required to pass (70 correct answers)</a:t>
+              <a:t>Graduates also qualify to sit the PCAP exam (100 MCQ, 3 hours, $199, valid 3 years).</a:t>
             </a:r>
             <a:endParaRPr lang="en-US" sz="1400" dirty="0"/>
           </a:p>
@@ -4115,6 +4131,10 @@
           </a:solidFill>
           <a:ln/>
         </p:spPr>
+        <p:txBody>
+          <a:bodyPr/>
+          <a:p/>
+        </p:txBody>
       </p:sp>
       <p:sp>
         <p:nvSpPr>
@@ -4389,7 +4409,7 @@
                 <a:ea typeface="Calibri" pitchFamily="34" charset="-122"/>
                 <a:cs typeface="Calibri" pitchFamily="34" charset="-120"/>
               </a:rPr>
-              <a:t>Time management: skip hard Q, return later (average 1.8 min/Q)</a:t>
+              <a:t>Time management: skip hard Q, return later (average 1.5 min/Q)</a:t>
             </a:r>
             <a:endParaRPr lang="en-US" sz="1400" dirty="0"/>
           </a:p>
@@ -4485,6 +4505,10 @@
           </a:solidFill>
           <a:ln/>
         </p:spPr>
+        <p:txBody>
+          <a:bodyPr/>
+          <a:p/>
+        </p:txBody>
       </p:sp>
       <p:sp>
         <p:nvSpPr>
@@ -4855,6 +4879,10 @@
           </a:solidFill>
           <a:ln/>
         </p:spPr>
+        <p:txBody>
+          <a:bodyPr/>
+          <a:p/>
+        </p:txBody>
       </p:sp>
       <p:sp>
         <p:nvSpPr>
@@ -5185,6 +5213,10 @@
           </a:solidFill>
           <a:ln/>
         </p:spPr>
+        <p:txBody>
+          <a:bodyPr/>
+          <a:p/>
+        </p:txBody>
       </p:sp>
       <p:sp>
         <p:nvSpPr>
@@ -5647,7 +5679,7 @@
                 <a:ea typeface="Calibri" pitchFamily="34" charset="-122"/>
                 <a:cs typeface="Calibri" pitchFamily="34" charset="-120"/>
               </a:rPr>
-              <a:t>www.proxiant.com</a:t>
+              <a:t>proxiant.ai</a:t>
             </a:r>
             <a:endParaRPr lang="en-US" sz="1600" dirty="0"/>
           </a:p>
@@ -5782,6 +5814,10 @@
           </a:solidFill>
           <a:ln/>
         </p:spPr>
+        <p:txBody>
+          <a:bodyPr/>
+          <a:p/>
+        </p:txBody>
       </p:sp>
       <p:sp>
         <p:nvSpPr>
@@ -6192,6 +6228,10 @@
           </a:solidFill>
           <a:ln/>
         </p:spPr>
+        <p:txBody>
+          <a:bodyPr/>
+          <a:p/>
+        </p:txBody>
       </p:sp>
       <p:sp>
         <p:nvSpPr>
@@ -6562,6 +6602,10 @@
           </a:solidFill>
           <a:ln/>
         </p:spPr>
+        <p:txBody>
+          <a:bodyPr/>
+          <a:p/>
+        </p:txBody>
       </p:sp>
       <p:sp>
         <p:nvSpPr>
@@ -6892,6 +6936,10 @@
           </a:solidFill>
           <a:ln/>
         </p:spPr>
+        <p:txBody>
+          <a:bodyPr/>
+          <a:p/>
+        </p:txBody>
       </p:sp>
       <p:sp>
         <p:nvSpPr>
@@ -7262,6 +7310,10 @@
           </a:solidFill>
           <a:ln/>
         </p:spPr>
+        <p:txBody>
+          <a:bodyPr/>
+          <a:p/>
+        </p:txBody>
       </p:sp>
       <p:sp>
         <p:nvSpPr>
@@ -7632,6 +7684,10 @@
           </a:solidFill>
           <a:ln/>
         </p:spPr>
+        <p:txBody>
+          <a:bodyPr/>
+          <a:p/>
+        </p:txBody>
       </p:sp>
       <p:sp>
         <p:nvSpPr>
@@ -7962,6 +8018,10 @@
           </a:solidFill>
           <a:ln/>
         </p:spPr>
+        <p:txBody>
+          <a:bodyPr/>
+          <a:p/>
+        </p:txBody>
       </p:sp>
       <p:sp>
         <p:nvSpPr>
@@ -8332,6 +8392,10 @@
           </a:solidFill>
           <a:ln/>
         </p:spPr>
+        <p:txBody>
+          <a:bodyPr/>
+          <a:p/>
+        </p:txBody>
       </p:sp>
       <p:sp>
         <p:nvSpPr>

--- a/AI_for_Operations_Course/Slides/Class_12_Capstone_Certification_Review.pptx
+++ b/AI_for_Operations_Course/Slides/Class_12_Capstone_Certification_Review.pptx
@@ -3715,7 +3715,7 @@
                 <a:ea typeface="Georgia" pitchFamily="34" charset="-122"/>
                 <a:cs typeface="Georgia" pitchFamily="34" charset="-120"/>
               </a:rPr>
-              <a:t>PCAP (Proxiant Certified AI Professional): Exam Structure</a:t>
+              <a:t>PCAIP (Proxiant Certified AI Professional): Exam Structure</a:t>
             </a:r>
             <a:endParaRPr lang="en-US" sz="3200" dirty="0"/>
           </a:p>
@@ -3795,7 +3795,7 @@
                 <a:ea typeface="Calibri" pitchFamily="34" charset="-122"/>
                 <a:cs typeface="Calibri" pitchFamily="34" charset="-120"/>
               </a:rPr>
-              <a:t>Graduates also qualify to sit the PCAP exam (100 MCQ, 3 hours, $199, valid 3 years).</a:t>
+              <a:t>Graduates also qualify to sit the PCAIP exam (100 MCQ, 3 hours, $199, valid 3 years).</a:t>
             </a:r>
             <a:endParaRPr lang="en-US" sz="1400" dirty="0"/>
           </a:p>
@@ -4169,7 +4169,7 @@
                 <a:ea typeface="Georgia" pitchFamily="34" charset="-122"/>
                 <a:cs typeface="Georgia" pitchFamily="34" charset="-120"/>
               </a:rPr>
-              <a:t>PCAP Exam Prep: Study Tips</a:t>
+              <a:t>PCAIP Exam Prep: Study Tips</a:t>
             </a:r>
             <a:endParaRPr lang="en-US" sz="3200" dirty="0"/>
           </a:p>
@@ -6012,7 +6012,7 @@
                 <a:ea typeface="Calibri" pitchFamily="34" charset="-122"/>
                 <a:cs typeface="Calibri" pitchFamily="34" charset="-120"/>
               </a:rPr>
-              <a:t>PCAP Certification Overview &amp; Study Tips</a:t>
+              <a:t>PCAIP Certification Overview &amp; Study Tips</a:t>
             </a:r>
             <a:endParaRPr lang="en-US" sz="1400" dirty="0"/>
           </a:p>
